--- a/Nepesseg 2025.pptx
+++ b/Nepesseg 2025.pptx
@@ -8,6 +8,9 @@
     <p:sldId id="256" r:id="rId2"/>
     <p:sldId id="257" r:id="rId3"/>
     <p:sldId id="258" r:id="rId4"/>
+    <p:sldId id="259" r:id="rId5"/>
+    <p:sldId id="260" r:id="rId6"/>
+    <p:sldId id="261" r:id="rId7"/>
   </p:sldIdLst>
   <p:sldSz cx="12192000" cy="6858000"/>
   <p:notesSz cx="6858000" cy="9144000"/>
@@ -106,6 +109,11 @@
       </a:defRPr>
     </a:lvl9pPr>
   </p:defaultTextStyle>
+  <p:extLst>
+    <p:ext uri="{EFAFB233-063F-42B5-8137-9DF3F51BA10A}">
+      <p15:sldGuideLst xmlns:p15="http://schemas.microsoft.com/office/powerpoint/2012/main"/>
+    </p:ext>
+  </p:extLst>
 </p:presentation>
 </file>
 
@@ -256,7 +264,7 @@
           <a:p>
             <a:fld id="{115A625E-DF5F-4142-99D9-F58E593E6696}" type="datetimeFigureOut">
               <a:rPr lang="hu-HU" smtClean="0"/>
-              <a:t>2026. 09. 11.</a:t>
+              <a:t>2026. 09. 15.</a:t>
             </a:fld>
             <a:endParaRPr lang="hu-HU"/>
           </a:p>
@@ -454,7 +462,7 @@
           <a:p>
             <a:fld id="{115A625E-DF5F-4142-99D9-F58E593E6696}" type="datetimeFigureOut">
               <a:rPr lang="hu-HU" smtClean="0"/>
-              <a:t>2026. 09. 11.</a:t>
+              <a:t>2026. 09. 15.</a:t>
             </a:fld>
             <a:endParaRPr lang="hu-HU"/>
           </a:p>
@@ -662,7 +670,7 @@
           <a:p>
             <a:fld id="{115A625E-DF5F-4142-99D9-F58E593E6696}" type="datetimeFigureOut">
               <a:rPr lang="hu-HU" smtClean="0"/>
-              <a:t>2026. 09. 11.</a:t>
+              <a:t>2026. 09. 15.</a:t>
             </a:fld>
             <a:endParaRPr lang="hu-HU"/>
           </a:p>
@@ -860,7 +868,7 @@
           <a:p>
             <a:fld id="{115A625E-DF5F-4142-99D9-F58E593E6696}" type="datetimeFigureOut">
               <a:rPr lang="hu-HU" smtClean="0"/>
-              <a:t>2026. 09. 11.</a:t>
+              <a:t>2026. 09. 15.</a:t>
             </a:fld>
             <a:endParaRPr lang="hu-HU"/>
           </a:p>
@@ -1135,7 +1143,7 @@
           <a:p>
             <a:fld id="{115A625E-DF5F-4142-99D9-F58E593E6696}" type="datetimeFigureOut">
               <a:rPr lang="hu-HU" smtClean="0"/>
-              <a:t>2026. 09. 11.</a:t>
+              <a:t>2026. 09. 15.</a:t>
             </a:fld>
             <a:endParaRPr lang="hu-HU"/>
           </a:p>
@@ -1400,7 +1408,7 @@
           <a:p>
             <a:fld id="{115A625E-DF5F-4142-99D9-F58E593E6696}" type="datetimeFigureOut">
               <a:rPr lang="hu-HU" smtClean="0"/>
-              <a:t>2026. 09. 11.</a:t>
+              <a:t>2026. 09. 15.</a:t>
             </a:fld>
             <a:endParaRPr lang="hu-HU"/>
           </a:p>
@@ -1812,7 +1820,7 @@
           <a:p>
             <a:fld id="{115A625E-DF5F-4142-99D9-F58E593E6696}" type="datetimeFigureOut">
               <a:rPr lang="hu-HU" smtClean="0"/>
-              <a:t>2026. 09. 11.</a:t>
+              <a:t>2026. 09. 15.</a:t>
             </a:fld>
             <a:endParaRPr lang="hu-HU"/>
           </a:p>
@@ -1953,7 +1961,7 @@
           <a:p>
             <a:fld id="{115A625E-DF5F-4142-99D9-F58E593E6696}" type="datetimeFigureOut">
               <a:rPr lang="hu-HU" smtClean="0"/>
-              <a:t>2026. 09. 11.</a:t>
+              <a:t>2026. 09. 15.</a:t>
             </a:fld>
             <a:endParaRPr lang="hu-HU"/>
           </a:p>
@@ -2066,7 +2074,7 @@
           <a:p>
             <a:fld id="{115A625E-DF5F-4142-99D9-F58E593E6696}" type="datetimeFigureOut">
               <a:rPr lang="hu-HU" smtClean="0"/>
-              <a:t>2026. 09. 11.</a:t>
+              <a:t>2026. 09. 15.</a:t>
             </a:fld>
             <a:endParaRPr lang="hu-HU"/>
           </a:p>
@@ -2377,7 +2385,7 @@
           <a:p>
             <a:fld id="{115A625E-DF5F-4142-99D9-F58E593E6696}" type="datetimeFigureOut">
               <a:rPr lang="hu-HU" smtClean="0"/>
-              <a:t>2026. 09. 11.</a:t>
+              <a:t>2026. 09. 15.</a:t>
             </a:fld>
             <a:endParaRPr lang="hu-HU"/>
           </a:p>
@@ -2665,7 +2673,7 @@
           <a:p>
             <a:fld id="{115A625E-DF5F-4142-99D9-F58E593E6696}" type="datetimeFigureOut">
               <a:rPr lang="hu-HU" smtClean="0"/>
-              <a:t>2026. 09. 11.</a:t>
+              <a:t>2026. 09. 15.</a:t>
             </a:fld>
             <a:endParaRPr lang="hu-HU"/>
           </a:p>
@@ -2906,7 +2914,7 @@
           <a:p>
             <a:fld id="{115A625E-DF5F-4142-99D9-F58E593E6696}" type="datetimeFigureOut">
               <a:rPr lang="hu-HU" smtClean="0"/>
-              <a:t>2026. 09. 11.</a:t>
+              <a:t>2026. 09. 15.</a:t>
             </a:fld>
             <a:endParaRPr lang="hu-HU"/>
           </a:p>
@@ -3425,659 +3433,53 @@
           <a:chExt cx="0" cy="0"/>
         </a:xfrm>
       </p:grpSpPr>
-      <p:grpSp>
-        <p:nvGrpSpPr>
-          <p:cNvPr id="31" name="Csoportba foglalás 30">
-            <a:extLst>
-              <a:ext uri="{FF2B5EF4-FFF2-40B4-BE49-F238E27FC236}">
-                <a16:creationId xmlns:a16="http://schemas.microsoft.com/office/drawing/2014/main" id="{93091007-4991-46AC-9A21-94F00B05CA39}"/>
-              </a:ext>
-            </a:extLst>
-          </p:cNvPr>
-          <p:cNvGrpSpPr/>
+      <p:pic>
+        <p:nvPicPr>
+          <p:cNvPr id="1026" name="Picture 2">
+            <a:extLst>
+              <a:ext uri="{FF2B5EF4-FFF2-40B4-BE49-F238E27FC236}">
+                <a16:creationId xmlns:a16="http://schemas.microsoft.com/office/drawing/2014/main" id="{77B5E69B-A379-40DA-8D34-2B1769481835}"/>
+              </a:ext>
+            </a:extLst>
+          </p:cNvPr>
+          <p:cNvPicPr>
+            <a:picLocks noChangeAspect="1" noChangeArrowheads="1"/>
+          </p:cNvPicPr>
           <p:nvPr/>
-        </p:nvGrpSpPr>
-        <p:grpSpPr>
+        </p:nvPicPr>
+        <p:blipFill>
+          <a:blip r:embed="rId2">
+            <a:extLst>
+              <a:ext uri="{28A0092B-C50C-407E-A947-70E740481C1C}">
+                <a14:useLocalDpi xmlns:a14="http://schemas.microsoft.com/office/drawing/2010/main" val="0"/>
+              </a:ext>
+            </a:extLst>
+          </a:blip>
+          <a:srcRect/>
+          <a:stretch>
+            <a:fillRect/>
+          </a:stretch>
+        </p:blipFill>
+        <p:spPr bwMode="auto">
           <a:xfrm>
-            <a:off x="114066" y="1524000"/>
-            <a:ext cx="2916000" cy="5249333"/>
-            <a:chOff x="114066" y="1524000"/>
-            <a:chExt cx="2916000" cy="5249333"/>
-          </a:xfrm>
-        </p:grpSpPr>
-        <p:sp>
-          <p:nvSpPr>
-            <p:cNvPr id="18" name="Téglalap: lekerekített 17">
-              <a:extLst>
-                <a:ext uri="{FF2B5EF4-FFF2-40B4-BE49-F238E27FC236}">
-                  <a16:creationId xmlns:a16="http://schemas.microsoft.com/office/drawing/2014/main" id="{417ABAD7-6286-4D6D-A726-27899C207D69}"/>
-                </a:ext>
-              </a:extLst>
-            </p:cNvPr>
-            <p:cNvSpPr>
-              <a:spLocks/>
-            </p:cNvSpPr>
-            <p:nvPr/>
-          </p:nvSpPr>
-          <p:spPr>
-            <a:xfrm>
-              <a:off x="114066" y="1524000"/>
-              <a:ext cx="2916000" cy="5249333"/>
-            </a:xfrm>
-            <a:prstGeom prst="roundRect">
-              <a:avLst/>
-            </a:prstGeom>
-          </p:spPr>
-          <p:style>
-            <a:lnRef idx="2">
-              <a:schemeClr val="accent1">
-                <a:shade val="50000"/>
-              </a:schemeClr>
-            </a:lnRef>
-            <a:fillRef idx="1">
-              <a:schemeClr val="accent1"/>
-            </a:fillRef>
-            <a:effectRef idx="0">
-              <a:schemeClr val="accent1"/>
-            </a:effectRef>
-            <a:fontRef idx="minor">
-              <a:schemeClr val="lt1"/>
-            </a:fontRef>
-          </p:style>
-          <p:txBody>
-            <a:bodyPr rtlCol="0" anchor="ctr"/>
-            <a:lstStyle/>
-            <a:p>
-              <a:pPr algn="ctr"/>
-              <a:endParaRPr lang="hu-HU" dirty="0"/>
-            </a:p>
-          </p:txBody>
-        </p:sp>
-        <p:sp>
-          <p:nvSpPr>
-            <p:cNvPr id="23" name="Szövegdoboz 22">
-              <a:extLst>
-                <a:ext uri="{FF2B5EF4-FFF2-40B4-BE49-F238E27FC236}">
-                  <a16:creationId xmlns:a16="http://schemas.microsoft.com/office/drawing/2014/main" id="{6F51F39B-1277-4509-B02F-2145673D3EEA}"/>
-                </a:ext>
-              </a:extLst>
-            </p:cNvPr>
-            <p:cNvSpPr txBox="1"/>
-            <p:nvPr/>
-          </p:nvSpPr>
-          <p:spPr>
-            <a:xfrm>
-              <a:off x="482600" y="2269067"/>
-              <a:ext cx="1337733" cy="369332"/>
-            </a:xfrm>
-            <a:prstGeom prst="rect">
-              <a:avLst/>
-            </a:prstGeom>
-            <a:noFill/>
-          </p:spPr>
-          <p:txBody>
-            <a:bodyPr wrap="square" rtlCol="0">
-              <a:spAutoFit/>
-            </a:bodyPr>
-            <a:lstStyle/>
-            <a:p>
-              <a:r>
-                <a:rPr lang="hu-HU" dirty="0" err="1"/>
-                <a:t>asd</a:t>
-              </a:r>
-              <a:endParaRPr lang="hu-HU" dirty="0"/>
-            </a:p>
-          </p:txBody>
-        </p:sp>
-      </p:grpSp>
-      <p:grpSp>
-        <p:nvGrpSpPr>
-          <p:cNvPr id="32" name="Csoportba foglalás 31">
-            <a:extLst>
-              <a:ext uri="{FF2B5EF4-FFF2-40B4-BE49-F238E27FC236}">
-                <a16:creationId xmlns:a16="http://schemas.microsoft.com/office/drawing/2014/main" id="{3E99D4D1-F150-4803-9EB4-5E8AAD726B54}"/>
-              </a:ext>
-            </a:extLst>
-          </p:cNvPr>
-          <p:cNvGrpSpPr/>
-          <p:nvPr/>
-        </p:nvGrpSpPr>
-        <p:grpSpPr>
-          <a:xfrm>
-            <a:off x="3135666" y="1523998"/>
-            <a:ext cx="2916000" cy="5249333"/>
-            <a:chOff x="3135666" y="1523998"/>
-            <a:chExt cx="2916000" cy="5249333"/>
-          </a:xfrm>
-        </p:grpSpPr>
-        <p:sp>
-          <p:nvSpPr>
-            <p:cNvPr id="19" name="Téglalap: lekerekített 18">
-              <a:extLst>
-                <a:ext uri="{FF2B5EF4-FFF2-40B4-BE49-F238E27FC236}">
-                  <a16:creationId xmlns:a16="http://schemas.microsoft.com/office/drawing/2014/main" id="{1F944B3F-64CD-4BDC-AF68-2BC76AD4AA8B}"/>
-                </a:ext>
-              </a:extLst>
-            </p:cNvPr>
-            <p:cNvSpPr>
-              <a:spLocks/>
-            </p:cNvSpPr>
-            <p:nvPr/>
-          </p:nvSpPr>
-          <p:spPr>
-            <a:xfrm>
-              <a:off x="3135666" y="1523998"/>
-              <a:ext cx="2916000" cy="5249333"/>
-            </a:xfrm>
-            <a:prstGeom prst="roundRect">
-              <a:avLst/>
-            </a:prstGeom>
-          </p:spPr>
-          <p:style>
-            <a:lnRef idx="2">
-              <a:schemeClr val="accent1">
-                <a:shade val="50000"/>
-              </a:schemeClr>
-            </a:lnRef>
-            <a:fillRef idx="1">
-              <a:schemeClr val="accent1"/>
-            </a:fillRef>
-            <a:effectRef idx="0">
-              <a:schemeClr val="accent1"/>
-            </a:effectRef>
-            <a:fontRef idx="minor">
-              <a:schemeClr val="lt1"/>
-            </a:fontRef>
-          </p:style>
-          <p:txBody>
-            <a:bodyPr rtlCol="0" anchor="ctr"/>
-            <a:lstStyle/>
-            <a:p>
-              <a:pPr algn="ctr"/>
-              <a:endParaRPr lang="hu-HU"/>
-            </a:p>
-          </p:txBody>
-        </p:sp>
-        <p:sp>
-          <p:nvSpPr>
-            <p:cNvPr id="24" name="Szövegdoboz 23">
-              <a:extLst>
-                <a:ext uri="{FF2B5EF4-FFF2-40B4-BE49-F238E27FC236}">
-                  <a16:creationId xmlns:a16="http://schemas.microsoft.com/office/drawing/2014/main" id="{42C3B58C-8E5A-4145-8410-D121A9FAA96D}"/>
-                </a:ext>
-              </a:extLst>
-            </p:cNvPr>
-            <p:cNvSpPr txBox="1"/>
-            <p:nvPr/>
-          </p:nvSpPr>
-          <p:spPr>
-            <a:xfrm>
-              <a:off x="4097866" y="2084401"/>
-              <a:ext cx="1337733" cy="369332"/>
-            </a:xfrm>
-            <a:prstGeom prst="rect">
-              <a:avLst/>
-            </a:prstGeom>
-            <a:noFill/>
-          </p:spPr>
-          <p:txBody>
-            <a:bodyPr wrap="square" rtlCol="0">
-              <a:spAutoFit/>
-            </a:bodyPr>
-            <a:lstStyle/>
-            <a:p>
-              <a:r>
-                <a:rPr lang="hu-HU" dirty="0" err="1"/>
-                <a:t>asd</a:t>
-              </a:r>
-              <a:endParaRPr lang="hu-HU" dirty="0"/>
-            </a:p>
-          </p:txBody>
-        </p:sp>
-      </p:grpSp>
-      <p:grpSp>
-        <p:nvGrpSpPr>
-          <p:cNvPr id="33" name="Csoportba foglalás 32">
-            <a:extLst>
-              <a:ext uri="{FF2B5EF4-FFF2-40B4-BE49-F238E27FC236}">
-                <a16:creationId xmlns:a16="http://schemas.microsoft.com/office/drawing/2014/main" id="{19945705-9DD2-45E8-8083-86B776678875}"/>
-              </a:ext>
-            </a:extLst>
-          </p:cNvPr>
-          <p:cNvGrpSpPr/>
-          <p:nvPr/>
-        </p:nvGrpSpPr>
-        <p:grpSpPr>
-          <a:xfrm>
-            <a:off x="6157266" y="1523997"/>
-            <a:ext cx="2916000" cy="5249333"/>
-            <a:chOff x="6157266" y="1523997"/>
-            <a:chExt cx="2916000" cy="5249333"/>
-          </a:xfrm>
-        </p:grpSpPr>
-        <p:sp>
-          <p:nvSpPr>
-            <p:cNvPr id="20" name="Téglalap: lekerekített 19">
-              <a:extLst>
-                <a:ext uri="{FF2B5EF4-FFF2-40B4-BE49-F238E27FC236}">
-                  <a16:creationId xmlns:a16="http://schemas.microsoft.com/office/drawing/2014/main" id="{57FF4984-5B3A-451E-8C41-DE8419E0CD23}"/>
-                </a:ext>
-              </a:extLst>
-            </p:cNvPr>
-            <p:cNvSpPr>
-              <a:spLocks/>
-            </p:cNvSpPr>
-            <p:nvPr/>
-          </p:nvSpPr>
-          <p:spPr>
-            <a:xfrm>
-              <a:off x="6157266" y="1523997"/>
-              <a:ext cx="2916000" cy="5249333"/>
-            </a:xfrm>
-            <a:prstGeom prst="roundRect">
-              <a:avLst/>
-            </a:prstGeom>
-          </p:spPr>
-          <p:style>
-            <a:lnRef idx="2">
-              <a:schemeClr val="accent1">
-                <a:shade val="50000"/>
-              </a:schemeClr>
-            </a:lnRef>
-            <a:fillRef idx="1">
-              <a:schemeClr val="accent1"/>
-            </a:fillRef>
-            <a:effectRef idx="0">
-              <a:schemeClr val="accent1"/>
-            </a:effectRef>
-            <a:fontRef idx="minor">
-              <a:schemeClr val="lt1"/>
-            </a:fontRef>
-          </p:style>
-          <p:txBody>
-            <a:bodyPr rtlCol="0" anchor="ctr"/>
-            <a:lstStyle/>
-            <a:p>
-              <a:pPr algn="ctr"/>
-              <a:endParaRPr lang="hu-HU"/>
-            </a:p>
-          </p:txBody>
-        </p:sp>
-        <p:sp>
-          <p:nvSpPr>
-            <p:cNvPr id="25" name="Szövegdoboz 24">
-              <a:extLst>
-                <a:ext uri="{FF2B5EF4-FFF2-40B4-BE49-F238E27FC236}">
-                  <a16:creationId xmlns:a16="http://schemas.microsoft.com/office/drawing/2014/main" id="{7BA59F2D-8844-42CF-921A-16CDB35BFDA5}"/>
-                </a:ext>
-              </a:extLst>
-            </p:cNvPr>
-            <p:cNvSpPr txBox="1"/>
-            <p:nvPr/>
-          </p:nvSpPr>
-          <p:spPr>
-            <a:xfrm>
-              <a:off x="7225066" y="2084401"/>
-              <a:ext cx="1337733" cy="369332"/>
-            </a:xfrm>
-            <a:prstGeom prst="rect">
-              <a:avLst/>
-            </a:prstGeom>
-            <a:noFill/>
-          </p:spPr>
-          <p:txBody>
-            <a:bodyPr wrap="square" rtlCol="0">
-              <a:spAutoFit/>
-            </a:bodyPr>
-            <a:lstStyle/>
-            <a:p>
-              <a:r>
-                <a:rPr lang="hu-HU" dirty="0" err="1"/>
-                <a:t>asd</a:t>
-              </a:r>
-              <a:endParaRPr lang="hu-HU" dirty="0"/>
-            </a:p>
-          </p:txBody>
-        </p:sp>
-      </p:grpSp>
-      <p:sp>
-        <p:nvSpPr>
-          <p:cNvPr id="21" name="Téglalap: lekerekített 20">
-            <a:extLst>
-              <a:ext uri="{FF2B5EF4-FFF2-40B4-BE49-F238E27FC236}">
-                <a16:creationId xmlns:a16="http://schemas.microsoft.com/office/drawing/2014/main" id="{7BBD3B1B-6499-4FC6-9A39-6DA1B01EBBDC}"/>
-              </a:ext>
-            </a:extLst>
-          </p:cNvPr>
-          <p:cNvSpPr>
-            <a:spLocks/>
-          </p:cNvSpPr>
-          <p:nvPr/>
-        </p:nvSpPr>
-        <p:spPr>
-          <a:xfrm>
-            <a:off x="9178866" y="1524001"/>
-            <a:ext cx="2916000" cy="5249333"/>
-          </a:xfrm>
-          <a:prstGeom prst="roundRect">
-            <a:avLst/>
-          </a:prstGeom>
-        </p:spPr>
-        <p:style>
-          <a:lnRef idx="2">
-            <a:schemeClr val="accent1">
-              <a:shade val="50000"/>
-            </a:schemeClr>
-          </a:lnRef>
-          <a:fillRef idx="1">
-            <a:schemeClr val="accent1"/>
-          </a:fillRef>
-          <a:effectRef idx="0">
-            <a:schemeClr val="accent1"/>
-          </a:effectRef>
-          <a:fontRef idx="minor">
-            <a:schemeClr val="lt1"/>
-          </a:fontRef>
-        </p:style>
-        <p:txBody>
-          <a:bodyPr rtlCol="0" anchor="ctr"/>
-          <a:lstStyle/>
-          <a:p>
-            <a:pPr algn="ctr"/>
-            <a:endParaRPr lang="hu-HU" dirty="0"/>
-          </a:p>
-        </p:txBody>
-      </p:sp>
-      <p:sp>
-        <p:nvSpPr>
-          <p:cNvPr id="26" name="Szövegdoboz 25">
-            <a:extLst>
-              <a:ext uri="{FF2B5EF4-FFF2-40B4-BE49-F238E27FC236}">
-                <a16:creationId xmlns:a16="http://schemas.microsoft.com/office/drawing/2014/main" id="{0D297355-6410-4104-86B3-34CA37AC7006}"/>
-              </a:ext>
-            </a:extLst>
-          </p:cNvPr>
-          <p:cNvSpPr txBox="1"/>
-          <p:nvPr/>
-        </p:nvSpPr>
-        <p:spPr>
-          <a:xfrm>
-            <a:off x="9805399" y="2084401"/>
-            <a:ext cx="1337733" cy="369332"/>
+            <a:off x="3401725" y="2417194"/>
+            <a:ext cx="5388549" cy="3530635"/>
           </a:xfrm>
           <a:prstGeom prst="rect">
             <a:avLst/>
           </a:prstGeom>
           <a:noFill/>
+          <a:extLst>
+            <a:ext uri="{909E8E84-426E-40DD-AFC4-6F175D3DCCD1}">
+              <a14:hiddenFill xmlns:a14="http://schemas.microsoft.com/office/drawing/2010/main">
+                <a:solidFill>
+                  <a:srgbClr val="FFFFFF"/>
+                </a:solidFill>
+              </a14:hiddenFill>
+            </a:ext>
+          </a:extLst>
         </p:spPr>
-        <p:txBody>
-          <a:bodyPr wrap="square" rtlCol="0">
-            <a:spAutoFit/>
-          </a:bodyPr>
-          <a:lstStyle/>
-          <a:p>
-            <a:r>
-              <a:rPr lang="hu-HU" dirty="0"/>
-              <a:t>Kilépés</a:t>
-            </a:r>
-          </a:p>
-        </p:txBody>
-      </p:sp>
-      <p:sp>
-        <p:nvSpPr>
-          <p:cNvPr id="36" name="Téglalap: lekerekített 35">
-            <a:extLst>
-              <a:ext uri="{FF2B5EF4-FFF2-40B4-BE49-F238E27FC236}">
-                <a16:creationId xmlns:a16="http://schemas.microsoft.com/office/drawing/2014/main" id="{CA7396F8-5ADC-4138-B8B0-EE0FDE7652AC}"/>
-              </a:ext>
-            </a:extLst>
-          </p:cNvPr>
-          <p:cNvSpPr>
-            <a:spLocks/>
-          </p:cNvSpPr>
-          <p:nvPr/>
-        </p:nvSpPr>
-        <p:spPr>
-          <a:xfrm>
-            <a:off x="97134" y="1524004"/>
-            <a:ext cx="2916000" cy="5249333"/>
-          </a:xfrm>
-          <a:prstGeom prst="roundRect">
-            <a:avLst/>
-          </a:prstGeom>
-        </p:spPr>
-        <p:style>
-          <a:lnRef idx="2">
-            <a:schemeClr val="accent1">
-              <a:shade val="50000"/>
-            </a:schemeClr>
-          </a:lnRef>
-          <a:fillRef idx="1">
-            <a:schemeClr val="accent1"/>
-          </a:fillRef>
-          <a:effectRef idx="0">
-            <a:schemeClr val="accent1"/>
-          </a:effectRef>
-          <a:fontRef idx="minor">
-            <a:schemeClr val="lt1"/>
-          </a:fontRef>
-        </p:style>
-        <p:txBody>
-          <a:bodyPr rtlCol="0" anchor="ctr"/>
-          <a:lstStyle/>
-          <a:p>
-            <a:pPr algn="ctr"/>
-            <a:endParaRPr lang="hu-HU" dirty="0"/>
-          </a:p>
-        </p:txBody>
-      </p:sp>
-      <p:sp>
-        <p:nvSpPr>
-          <p:cNvPr id="37" name="Szövegdoboz 36">
-            <a:extLst>
-              <a:ext uri="{FF2B5EF4-FFF2-40B4-BE49-F238E27FC236}">
-                <a16:creationId xmlns:a16="http://schemas.microsoft.com/office/drawing/2014/main" id="{357F9641-B4BE-4AB1-991B-A6CE448924C1}"/>
-              </a:ext>
-            </a:extLst>
-          </p:cNvPr>
-          <p:cNvSpPr txBox="1"/>
-          <p:nvPr/>
-        </p:nvSpPr>
-        <p:spPr>
-          <a:xfrm>
-            <a:off x="465668" y="2269071"/>
-            <a:ext cx="1337733" cy="646331"/>
-          </a:xfrm>
-          <a:prstGeom prst="rect">
-            <a:avLst/>
-          </a:prstGeom>
-          <a:noFill/>
-        </p:spPr>
-        <p:txBody>
-          <a:bodyPr wrap="square" rtlCol="0">
-            <a:spAutoFit/>
-          </a:bodyPr>
-          <a:lstStyle/>
-          <a:p>
-            <a:r>
-              <a:rPr lang="hu-HU" dirty="0"/>
-              <a:t>Megye adatai</a:t>
-            </a:r>
-          </a:p>
-        </p:txBody>
-      </p:sp>
-      <p:sp>
-        <p:nvSpPr>
-          <p:cNvPr id="39" name="Téglalap: lekerekített 38">
-            <a:extLst>
-              <a:ext uri="{FF2B5EF4-FFF2-40B4-BE49-F238E27FC236}">
-                <a16:creationId xmlns:a16="http://schemas.microsoft.com/office/drawing/2014/main" id="{2291AD58-EA79-41DE-B9CE-EB81311DA2A3}"/>
-              </a:ext>
-            </a:extLst>
-          </p:cNvPr>
-          <p:cNvSpPr>
-            <a:spLocks/>
-          </p:cNvSpPr>
-          <p:nvPr/>
-        </p:nvSpPr>
-        <p:spPr>
-          <a:xfrm>
-            <a:off x="3118734" y="1524002"/>
-            <a:ext cx="2916000" cy="5249333"/>
-          </a:xfrm>
-          <a:prstGeom prst="roundRect">
-            <a:avLst/>
-          </a:prstGeom>
-        </p:spPr>
-        <p:style>
-          <a:lnRef idx="2">
-            <a:schemeClr val="accent1">
-              <a:shade val="50000"/>
-            </a:schemeClr>
-          </a:lnRef>
-          <a:fillRef idx="1">
-            <a:schemeClr val="accent1"/>
-          </a:fillRef>
-          <a:effectRef idx="0">
-            <a:schemeClr val="accent1"/>
-          </a:effectRef>
-          <a:fontRef idx="minor">
-            <a:schemeClr val="lt1"/>
-          </a:fontRef>
-        </p:style>
-        <p:txBody>
-          <a:bodyPr rtlCol="0" anchor="ctr"/>
-          <a:lstStyle/>
-          <a:p>
-            <a:pPr algn="ctr"/>
-            <a:endParaRPr lang="hu-HU"/>
-          </a:p>
-        </p:txBody>
-      </p:sp>
-      <p:sp>
-        <p:nvSpPr>
-          <p:cNvPr id="40" name="Szövegdoboz 39">
-            <a:extLst>
-              <a:ext uri="{FF2B5EF4-FFF2-40B4-BE49-F238E27FC236}">
-                <a16:creationId xmlns:a16="http://schemas.microsoft.com/office/drawing/2014/main" id="{C6B1FB5C-89AB-4FB5-8CA5-7AABA3C8E4BE}"/>
-              </a:ext>
-            </a:extLst>
-          </p:cNvPr>
-          <p:cNvSpPr txBox="1"/>
-          <p:nvPr/>
-        </p:nvSpPr>
-        <p:spPr>
-          <a:xfrm>
-            <a:off x="4080934" y="2084405"/>
-            <a:ext cx="1337733" cy="646331"/>
-          </a:xfrm>
-          <a:prstGeom prst="rect">
-            <a:avLst/>
-          </a:prstGeom>
-          <a:noFill/>
-        </p:spPr>
-        <p:txBody>
-          <a:bodyPr wrap="square" rtlCol="0">
-            <a:spAutoFit/>
-          </a:bodyPr>
-          <a:lstStyle/>
-          <a:p>
-            <a:r>
-              <a:rPr lang="hu-HU" dirty="0"/>
-              <a:t>Település </a:t>
-            </a:r>
-            <a:r>
-              <a:rPr lang="hu-HU" dirty="0" err="1"/>
-              <a:t>tipusai</a:t>
-            </a:r>
-            <a:endParaRPr lang="hu-HU" dirty="0"/>
-          </a:p>
-        </p:txBody>
-      </p:sp>
-      <p:sp>
-        <p:nvSpPr>
-          <p:cNvPr id="42" name="Téglalap: lekerekített 41">
-            <a:extLst>
-              <a:ext uri="{FF2B5EF4-FFF2-40B4-BE49-F238E27FC236}">
-                <a16:creationId xmlns:a16="http://schemas.microsoft.com/office/drawing/2014/main" id="{C1DA7E56-243D-4E96-873B-43CECC7469DE}"/>
-              </a:ext>
-            </a:extLst>
-          </p:cNvPr>
-          <p:cNvSpPr>
-            <a:spLocks/>
-          </p:cNvSpPr>
-          <p:nvPr/>
-        </p:nvSpPr>
-        <p:spPr>
-          <a:xfrm>
-            <a:off x="6140334" y="1524001"/>
-            <a:ext cx="2916000" cy="5249333"/>
-          </a:xfrm>
-          <a:prstGeom prst="roundRect">
-            <a:avLst/>
-          </a:prstGeom>
-        </p:spPr>
-        <p:style>
-          <a:lnRef idx="2">
-            <a:schemeClr val="accent1">
-              <a:shade val="50000"/>
-            </a:schemeClr>
-          </a:lnRef>
-          <a:fillRef idx="1">
-            <a:schemeClr val="accent1"/>
-          </a:fillRef>
-          <a:effectRef idx="0">
-            <a:schemeClr val="accent1"/>
-          </a:effectRef>
-          <a:fontRef idx="minor">
-            <a:schemeClr val="lt1"/>
-          </a:fontRef>
-        </p:style>
-        <p:txBody>
-          <a:bodyPr rtlCol="0" anchor="ctr"/>
-          <a:lstStyle/>
-          <a:p>
-            <a:pPr algn="ctr"/>
-            <a:endParaRPr lang="hu-HU"/>
-          </a:p>
-        </p:txBody>
-      </p:sp>
-      <p:sp>
-        <p:nvSpPr>
-          <p:cNvPr id="43" name="Szövegdoboz 42">
-            <a:extLst>
-              <a:ext uri="{FF2B5EF4-FFF2-40B4-BE49-F238E27FC236}">
-                <a16:creationId xmlns:a16="http://schemas.microsoft.com/office/drawing/2014/main" id="{E4BA85D0-E317-44A6-BF83-779AB4EF51A1}"/>
-              </a:ext>
-            </a:extLst>
-          </p:cNvPr>
-          <p:cNvSpPr txBox="1"/>
-          <p:nvPr/>
-        </p:nvSpPr>
-        <p:spPr>
-          <a:xfrm>
-            <a:off x="7208134" y="2084405"/>
-            <a:ext cx="1337733" cy="369332"/>
-          </a:xfrm>
-          <a:prstGeom prst="rect">
-            <a:avLst/>
-          </a:prstGeom>
-          <a:noFill/>
-        </p:spPr>
-        <p:txBody>
-          <a:bodyPr wrap="square" rtlCol="0">
-            <a:spAutoFit/>
-          </a:bodyPr>
-          <a:lstStyle/>
-          <a:p>
-            <a:r>
-              <a:rPr lang="hu-HU" dirty="0" err="1"/>
-              <a:t>asd</a:t>
-            </a:r>
-            <a:endParaRPr lang="hu-HU" dirty="0"/>
-          </a:p>
-        </p:txBody>
-      </p:sp>
+      </p:pic>
       <p:sp>
         <p:nvSpPr>
           <p:cNvPr id="44" name="Téglalap 43">
@@ -4155,6 +3557,355 @@
             <a:r>
               <a:rPr lang="hu-HU" dirty="0" err="1"/>
               <a:t>Menupont</a:t>
+            </a:r>
+            <a:endParaRPr lang="hu-HU" dirty="0"/>
+          </a:p>
+        </p:txBody>
+      </p:sp>
+      <p:sp>
+        <p:nvSpPr>
+          <p:cNvPr id="3" name="Téglalap: lekerekített 2">
+            <a:hlinkClick r:id="rId3" action="ppaction://hlinksldjump"/>
+            <a:extLst>
+              <a:ext uri="{FF2B5EF4-FFF2-40B4-BE49-F238E27FC236}">
+                <a16:creationId xmlns:a16="http://schemas.microsoft.com/office/drawing/2014/main" id="{6F93B0DC-DEAF-40AE-ACBE-AAA9AB419647}"/>
+              </a:ext>
+            </a:extLst>
+          </p:cNvPr>
+          <p:cNvSpPr/>
+          <p:nvPr/>
+        </p:nvSpPr>
+        <p:spPr>
+          <a:xfrm>
+            <a:off x="143933" y="1744133"/>
+            <a:ext cx="4250267" cy="1617133"/>
+          </a:xfrm>
+          <a:prstGeom prst="roundRect">
+            <a:avLst/>
+          </a:prstGeom>
+        </p:spPr>
+        <p:style>
+          <a:lnRef idx="2">
+            <a:schemeClr val="accent1">
+              <a:shade val="50000"/>
+            </a:schemeClr>
+          </a:lnRef>
+          <a:fillRef idx="1">
+            <a:schemeClr val="accent1"/>
+          </a:fillRef>
+          <a:effectRef idx="0">
+            <a:schemeClr val="accent1"/>
+          </a:effectRef>
+          <a:fontRef idx="minor">
+            <a:schemeClr val="lt1"/>
+          </a:fontRef>
+        </p:style>
+        <p:txBody>
+          <a:bodyPr rtlCol="0" anchor="ctr"/>
+          <a:lstStyle/>
+          <a:p>
+            <a:pPr algn="ctr"/>
+            <a:endParaRPr lang="hu-HU"/>
+          </a:p>
+        </p:txBody>
+      </p:sp>
+      <p:sp>
+        <p:nvSpPr>
+          <p:cNvPr id="48" name="Téglalap: lekerekített 47">
+            <a:extLst>
+              <a:ext uri="{FF2B5EF4-FFF2-40B4-BE49-F238E27FC236}">
+                <a16:creationId xmlns:a16="http://schemas.microsoft.com/office/drawing/2014/main" id="{0FD6DA59-9F40-4E74-BA2A-C51F2182BA99}"/>
+              </a:ext>
+            </a:extLst>
+          </p:cNvPr>
+          <p:cNvSpPr/>
+          <p:nvPr/>
+        </p:nvSpPr>
+        <p:spPr>
+          <a:xfrm>
+            <a:off x="7797800" y="1663699"/>
+            <a:ext cx="4250267" cy="1617133"/>
+          </a:xfrm>
+          <a:prstGeom prst="roundRect">
+            <a:avLst/>
+          </a:prstGeom>
+        </p:spPr>
+        <p:style>
+          <a:lnRef idx="2">
+            <a:schemeClr val="accent1">
+              <a:shade val="50000"/>
+            </a:schemeClr>
+          </a:lnRef>
+          <a:fillRef idx="1">
+            <a:schemeClr val="accent1"/>
+          </a:fillRef>
+          <a:effectRef idx="0">
+            <a:schemeClr val="accent1"/>
+          </a:effectRef>
+          <a:fontRef idx="minor">
+            <a:schemeClr val="lt1"/>
+          </a:fontRef>
+        </p:style>
+        <p:txBody>
+          <a:bodyPr rtlCol="0" anchor="ctr"/>
+          <a:lstStyle/>
+          <a:p>
+            <a:pPr algn="ctr"/>
+            <a:endParaRPr lang="hu-HU"/>
+          </a:p>
+        </p:txBody>
+      </p:sp>
+      <p:sp>
+        <p:nvSpPr>
+          <p:cNvPr id="49" name="Téglalap: lekerekített 48">
+            <a:hlinkClick r:id="rId4" action="ppaction://hlinksldjump"/>
+            <a:extLst>
+              <a:ext uri="{FF2B5EF4-FFF2-40B4-BE49-F238E27FC236}">
+                <a16:creationId xmlns:a16="http://schemas.microsoft.com/office/drawing/2014/main" id="{CFD0EA02-0D79-4E3F-B9A1-DA984B476FF2}"/>
+              </a:ext>
+            </a:extLst>
+          </p:cNvPr>
+          <p:cNvSpPr/>
+          <p:nvPr/>
+        </p:nvSpPr>
+        <p:spPr>
+          <a:xfrm>
+            <a:off x="143933" y="5130799"/>
+            <a:ext cx="4250267" cy="1617133"/>
+          </a:xfrm>
+          <a:prstGeom prst="roundRect">
+            <a:avLst/>
+          </a:prstGeom>
+        </p:spPr>
+        <p:style>
+          <a:lnRef idx="2">
+            <a:schemeClr val="accent1">
+              <a:shade val="50000"/>
+            </a:schemeClr>
+          </a:lnRef>
+          <a:fillRef idx="1">
+            <a:schemeClr val="accent1"/>
+          </a:fillRef>
+          <a:effectRef idx="0">
+            <a:schemeClr val="accent1"/>
+          </a:effectRef>
+          <a:fontRef idx="minor">
+            <a:schemeClr val="lt1"/>
+          </a:fontRef>
+        </p:style>
+        <p:txBody>
+          <a:bodyPr rtlCol="0" anchor="ctr"/>
+          <a:lstStyle/>
+          <a:p>
+            <a:pPr algn="ctr"/>
+            <a:endParaRPr lang="hu-HU" dirty="0"/>
+          </a:p>
+        </p:txBody>
+      </p:sp>
+      <p:sp>
+        <p:nvSpPr>
+          <p:cNvPr id="50" name="Téglalap: lekerekített 49">
+            <a:hlinkClick r:id="rId5" action="ppaction://hlinksldjump"/>
+            <a:extLst>
+              <a:ext uri="{FF2B5EF4-FFF2-40B4-BE49-F238E27FC236}">
+                <a16:creationId xmlns:a16="http://schemas.microsoft.com/office/drawing/2014/main" id="{AFCE0C69-C8CB-46B2-93F3-E4ED3D8F0C87}"/>
+              </a:ext>
+            </a:extLst>
+          </p:cNvPr>
+          <p:cNvSpPr/>
+          <p:nvPr/>
+        </p:nvSpPr>
+        <p:spPr>
+          <a:xfrm>
+            <a:off x="7797801" y="5130799"/>
+            <a:ext cx="4250267" cy="1617133"/>
+          </a:xfrm>
+          <a:prstGeom prst="roundRect">
+            <a:avLst/>
+          </a:prstGeom>
+        </p:spPr>
+        <p:style>
+          <a:lnRef idx="2">
+            <a:schemeClr val="accent1">
+              <a:shade val="50000"/>
+            </a:schemeClr>
+          </a:lnRef>
+          <a:fillRef idx="1">
+            <a:schemeClr val="accent1"/>
+          </a:fillRef>
+          <a:effectRef idx="0">
+            <a:schemeClr val="accent1"/>
+          </a:effectRef>
+          <a:fontRef idx="minor">
+            <a:schemeClr val="lt1"/>
+          </a:fontRef>
+        </p:style>
+        <p:txBody>
+          <a:bodyPr rtlCol="0" anchor="ctr"/>
+          <a:lstStyle/>
+          <a:p>
+            <a:pPr algn="ctr"/>
+            <a:endParaRPr lang="hu-HU"/>
+          </a:p>
+        </p:txBody>
+      </p:sp>
+      <p:sp>
+        <p:nvSpPr>
+          <p:cNvPr id="51" name="Szövegdoboz 50">
+            <a:extLst>
+              <a:ext uri="{FF2B5EF4-FFF2-40B4-BE49-F238E27FC236}">
+                <a16:creationId xmlns:a16="http://schemas.microsoft.com/office/drawing/2014/main" id="{ACCC987E-BF74-4912-A61A-3DFD45273134}"/>
+              </a:ext>
+            </a:extLst>
+          </p:cNvPr>
+          <p:cNvSpPr txBox="1"/>
+          <p:nvPr/>
+        </p:nvSpPr>
+        <p:spPr>
+          <a:xfrm>
+            <a:off x="1516591" y="2368033"/>
+            <a:ext cx="1504950" cy="369332"/>
+          </a:xfrm>
+          <a:prstGeom prst="rect">
+            <a:avLst/>
+          </a:prstGeom>
+          <a:noFill/>
+        </p:spPr>
+        <p:txBody>
+          <a:bodyPr wrap="square">
+            <a:spAutoFit/>
+          </a:bodyPr>
+          <a:lstStyle/>
+          <a:p>
+            <a:r>
+              <a:rPr lang="hu-HU" b="0" i="0" dirty="0">
+                <a:solidFill>
+                  <a:srgbClr val="1F1F1F"/>
+                </a:solidFill>
+                <a:effectLst/>
+                <a:latin typeface="Google Sans"/>
+              </a:rPr>
+              <a:t>Megye adatai</a:t>
+            </a:r>
+            <a:endParaRPr lang="hu-HU" dirty="0"/>
+          </a:p>
+        </p:txBody>
+      </p:sp>
+      <p:sp>
+        <p:nvSpPr>
+          <p:cNvPr id="52" name="Szövegdoboz 51">
+            <a:extLst>
+              <a:ext uri="{FF2B5EF4-FFF2-40B4-BE49-F238E27FC236}">
+                <a16:creationId xmlns:a16="http://schemas.microsoft.com/office/drawing/2014/main" id="{80BED1B7-BE6F-464A-9638-5C0AC731836E}"/>
+              </a:ext>
+            </a:extLst>
+          </p:cNvPr>
+          <p:cNvSpPr txBox="1"/>
+          <p:nvPr/>
+        </p:nvSpPr>
+        <p:spPr>
+          <a:xfrm>
+            <a:off x="9086850" y="2248466"/>
+            <a:ext cx="1870016" cy="369332"/>
+          </a:xfrm>
+          <a:prstGeom prst="rect">
+            <a:avLst/>
+          </a:prstGeom>
+          <a:noFill/>
+        </p:spPr>
+        <p:txBody>
+          <a:bodyPr wrap="square">
+            <a:spAutoFit/>
+          </a:bodyPr>
+          <a:lstStyle/>
+          <a:p>
+            <a:r>
+              <a:rPr lang="hu-HU" b="0" i="0">
+                <a:solidFill>
+                  <a:srgbClr val="1F1F1F"/>
+                </a:solidFill>
+                <a:effectLst/>
+                <a:latin typeface="Google Sans"/>
+              </a:rPr>
+              <a:t>Település típusai</a:t>
+            </a:r>
+            <a:endParaRPr lang="hu-HU" dirty="0"/>
+          </a:p>
+        </p:txBody>
+      </p:sp>
+      <p:sp>
+        <p:nvSpPr>
+          <p:cNvPr id="54" name="Szövegdoboz 53">
+            <a:extLst>
+              <a:ext uri="{FF2B5EF4-FFF2-40B4-BE49-F238E27FC236}">
+                <a16:creationId xmlns:a16="http://schemas.microsoft.com/office/drawing/2014/main" id="{9E791DFE-5A26-48F7-8267-3EDA186D5135}"/>
+              </a:ext>
+            </a:extLst>
+          </p:cNvPr>
+          <p:cNvSpPr txBox="1"/>
+          <p:nvPr/>
+        </p:nvSpPr>
+        <p:spPr>
+          <a:xfrm>
+            <a:off x="8814858" y="5763163"/>
+            <a:ext cx="2216150" cy="369332"/>
+          </a:xfrm>
+          <a:prstGeom prst="rect">
+            <a:avLst/>
+          </a:prstGeom>
+          <a:noFill/>
+        </p:spPr>
+        <p:txBody>
+          <a:bodyPr wrap="square">
+            <a:spAutoFit/>
+          </a:bodyPr>
+          <a:lstStyle/>
+          <a:p>
+            <a:r>
+              <a:rPr lang="hu-HU" b="0" i="0" dirty="0">
+                <a:solidFill>
+                  <a:srgbClr val="1F1F1F"/>
+                </a:solidFill>
+                <a:effectLst/>
+                <a:latin typeface="Google Sans"/>
+              </a:rPr>
+              <a:t>kilépés a programból</a:t>
+            </a:r>
+            <a:endParaRPr lang="hu-HU" dirty="0"/>
+          </a:p>
+        </p:txBody>
+      </p:sp>
+      <p:sp>
+        <p:nvSpPr>
+          <p:cNvPr id="7" name="Szövegdoboz 6">
+            <a:extLst>
+              <a:ext uri="{FF2B5EF4-FFF2-40B4-BE49-F238E27FC236}">
+                <a16:creationId xmlns:a16="http://schemas.microsoft.com/office/drawing/2014/main" id="{93B5F199-0002-4ACA-A44E-210D8FD212B0}"/>
+              </a:ext>
+            </a:extLst>
+          </p:cNvPr>
+          <p:cNvSpPr txBox="1"/>
+          <p:nvPr/>
+        </p:nvSpPr>
+        <p:spPr>
+          <a:xfrm>
+            <a:off x="2040466" y="5784328"/>
+            <a:ext cx="1439334" cy="369332"/>
+          </a:xfrm>
+          <a:prstGeom prst="rect">
+            <a:avLst/>
+          </a:prstGeom>
+          <a:noFill/>
+        </p:spPr>
+        <p:txBody>
+          <a:bodyPr wrap="square" rtlCol="0">
+            <a:spAutoFit/>
+          </a:bodyPr>
+          <a:lstStyle/>
+          <a:p>
+            <a:r>
+              <a:rPr lang="hu-HU" dirty="0" err="1"/>
+              <a:t>asd</a:t>
             </a:r>
             <a:endParaRPr lang="hu-HU" dirty="0"/>
           </a:p>
@@ -4194,6 +3945,96 @@
     <p:extLst>
       <p:ext uri="{BB962C8B-B14F-4D97-AF65-F5344CB8AC3E}">
         <p14:creationId xmlns:p14="http://schemas.microsoft.com/office/powerpoint/2010/main" val="3504979074"/>
+      </p:ext>
+    </p:extLst>
+  </p:cSld>
+  <p:clrMapOvr>
+    <a:masterClrMapping/>
+  </p:clrMapOvr>
+</p:sld>
+</file>
+
+<file path=ppt/slides/slide4.xml><?xml version="1.0" encoding="utf-8"?>
+<p:sld xmlns:a="http://schemas.openxmlformats.org/drawingml/2006/main" xmlns:r="http://schemas.openxmlformats.org/officeDocument/2006/relationships" xmlns:p="http://schemas.openxmlformats.org/presentationml/2006/main">
+  <p:cSld>
+    <p:spTree>
+      <p:nvGrpSpPr>
+        <p:cNvPr id="1" name=""/>
+        <p:cNvGrpSpPr/>
+        <p:nvPr/>
+      </p:nvGrpSpPr>
+      <p:grpSpPr>
+        <a:xfrm>
+          <a:off x="0" y="0"/>
+          <a:ext cx="0" cy="0"/>
+          <a:chOff x="0" y="0"/>
+          <a:chExt cx="0" cy="0"/>
+        </a:xfrm>
+      </p:grpSpPr>
+    </p:spTree>
+    <p:extLst>
+      <p:ext uri="{BB962C8B-B14F-4D97-AF65-F5344CB8AC3E}">
+        <p14:creationId xmlns:p14="http://schemas.microsoft.com/office/powerpoint/2010/main" val="1764700220"/>
+      </p:ext>
+    </p:extLst>
+  </p:cSld>
+  <p:clrMapOvr>
+    <a:masterClrMapping/>
+  </p:clrMapOvr>
+</p:sld>
+</file>
+
+<file path=ppt/slides/slide5.xml><?xml version="1.0" encoding="utf-8"?>
+<p:sld xmlns:a="http://schemas.openxmlformats.org/drawingml/2006/main" xmlns:r="http://schemas.openxmlformats.org/officeDocument/2006/relationships" xmlns:p="http://schemas.openxmlformats.org/presentationml/2006/main">
+  <p:cSld>
+    <p:spTree>
+      <p:nvGrpSpPr>
+        <p:cNvPr id="1" name=""/>
+        <p:cNvGrpSpPr/>
+        <p:nvPr/>
+      </p:nvGrpSpPr>
+      <p:grpSpPr>
+        <a:xfrm>
+          <a:off x="0" y="0"/>
+          <a:ext cx="0" cy="0"/>
+          <a:chOff x="0" y="0"/>
+          <a:chExt cx="0" cy="0"/>
+        </a:xfrm>
+      </p:grpSpPr>
+    </p:spTree>
+    <p:extLst>
+      <p:ext uri="{BB962C8B-B14F-4D97-AF65-F5344CB8AC3E}">
+        <p14:creationId xmlns:p14="http://schemas.microsoft.com/office/powerpoint/2010/main" val="2906885065"/>
+      </p:ext>
+    </p:extLst>
+  </p:cSld>
+  <p:clrMapOvr>
+    <a:masterClrMapping/>
+  </p:clrMapOvr>
+</p:sld>
+</file>
+
+<file path=ppt/slides/slide6.xml><?xml version="1.0" encoding="utf-8"?>
+<p:sld xmlns:a="http://schemas.openxmlformats.org/drawingml/2006/main" xmlns:r="http://schemas.openxmlformats.org/officeDocument/2006/relationships" xmlns:p="http://schemas.openxmlformats.org/presentationml/2006/main">
+  <p:cSld>
+    <p:spTree>
+      <p:nvGrpSpPr>
+        <p:cNvPr id="1" name=""/>
+        <p:cNvGrpSpPr/>
+        <p:nvPr/>
+      </p:nvGrpSpPr>
+      <p:grpSpPr>
+        <a:xfrm>
+          <a:off x="0" y="0"/>
+          <a:ext cx="0" cy="0"/>
+          <a:chOff x="0" y="0"/>
+          <a:chExt cx="0" cy="0"/>
+        </a:xfrm>
+      </p:grpSpPr>
+    </p:spTree>
+    <p:extLst>
+      <p:ext uri="{BB962C8B-B14F-4D97-AF65-F5344CB8AC3E}">
+        <p14:creationId xmlns:p14="http://schemas.microsoft.com/office/powerpoint/2010/main" val="75805544"/>
       </p:ext>
     </p:extLst>
   </p:cSld>
